--- a/01 Elementi Razvoja Softvera/02 Prezentacije/PPTX/04_Testabilni_dizajn_NUnit_i_Moq.pptx
+++ b/01 Elementi Razvoja Softvera/02 Prezentacije/PPTX/04_Testabilni_dizajn_NUnit_i_Moq.pptx
@@ -10623,7 +10623,7 @@
                 <a:ea typeface="Aptos"/>
                 <a:cs typeface="Aptos"/>
               </a:rPr>
-              <a:t>После ове контролне тачке AI добија већу улогу, али систем већ има структуру и тестове који омогућавају независну проверу.</a:t>
+              <a:t>P3 је после Вежбе 6, недеља од 23.11. После ње AI добија већу улогу, али систем већ има структуру и тестове за независну проверу.</a:t>
             </a:r>
           </a:p>
         </p:txBody>
@@ -11098,7 +11098,7 @@
                 <a:ea typeface="Aptos"/>
                 <a:cs typeface="Aptos"/>
               </a:rPr>
-              <a:t>Кључни use-case-ови имају NUnit тестове.</a:t>
+              <a:t>Кључни use-case-ови имају тестове за успешне и негативне сценарије.</a:t>
             </a:r>
           </a:p>
         </p:txBody>
@@ -11210,7 +11210,7 @@
                 <a:ea typeface="Aptos"/>
                 <a:cs typeface="Aptos"/>
               </a:rPr>
-              <a:t>Moq се користи само за променљиве спољне зависности.</a:t>
+              <a:t>Coverage је прегледан и ризична грана је покривена или образложена.</a:t>
             </a:r>
           </a:p>
         </p:txBody>
@@ -11322,7 +11322,7 @@
                 <a:ea typeface="Aptos"/>
                 <a:cs typeface="Aptos"/>
               </a:rPr>
-              <a:t>Coverage је прегледан и ризична грана је покривена или образложена.</a:t>
+              <a:t>Најмање један bug је прво репродукован тестом.</a:t>
             </a:r>
           </a:p>
         </p:txBody>
@@ -11434,7 +11434,7 @@
                 <a:ea typeface="Aptos"/>
                 <a:cs typeface="Aptos"/>
               </a:rPr>
-              <a:t>Најмање један bug је прво репродукован тестом.</a:t>
+              <a:t>Стабилна верзија језгра означена је Git tag-ом manual-core-baseline.</a:t>
             </a:r>
           </a:p>
         </p:txBody>
@@ -11546,7 +11546,7 @@
                 <a:ea typeface="Aptos"/>
                 <a:cs typeface="Aptos"/>
               </a:rPr>
-              <a:t>Стабилна верзија језгра означена је Git tag-ом manual-core-baseline.</a:t>
+              <a:t>Термин: недеља од 23.11., после Вежбе 6.</a:t>
             </a:r>
           </a:p>
         </p:txBody>

--- a/01 Elementi Razvoja Softvera/02 Prezentacije/PPTX/04_Testabilni_dizajn_NUnit_i_Moq.pptx
+++ b/01 Elementi Razvoja Softvera/02 Prezentacije/PPTX/04_Testabilni_dizajn_NUnit_i_Moq.pptx
@@ -18873,7 +18873,7 @@
         <p:spPr>
           <a:xfrm xmlns:a="http://schemas.openxmlformats.org/drawingml/2006/main">
             <a:off x="3311652" y="2999232"/>
-            <a:ext cx="1353312" cy="209855"/>
+            <a:ext cx="1353312" cy="271577"/>
           </a:xfrm>
           <a:prstGeom xmlns:a="http://schemas.openxmlformats.org/drawingml/2006/main" prst="rect">
             <a:avLst/>
@@ -18899,7 +18899,7 @@
               <a:buNone/>
             </a:pPr>
             <a:r>
-              <a:rPr sz="1275" b="1">
+              <a:rPr sz="1650" b="1">
                 <a:solidFill>
                   <a:srgbClr val="19222C"/>
                 </a:solidFill>
@@ -20962,39 +20962,6 @@
               </a:rPr>
               <a:t>&gt;(),</a:t>
             </a:r>
-            <a:r>
-              <a:rPr sz="1032">
-                <a:solidFill>
-                  <a:srgbClr val="262B36"/>
-                </a:solidFill>
-                <a:latin typeface="Consolas"/>
-                <a:ea typeface="Consolas"/>
-                <a:cs typeface="Consolas"/>
-              </a:rPr>
-              <a:t> </a:t>
-            </a:r>
-            <a:r>
-              <a:rPr sz="1032" b="1">
-                <a:solidFill>
-                  <a:srgbClr val="7442C8"/>
-                </a:solidFill>
-                <a:latin typeface="Consolas"/>
-                <a:ea typeface="Consolas"/>
-                <a:cs typeface="Consolas"/>
-              </a:rPr>
-              <a:t>It</a:t>
-            </a:r>
-            <a:r>
-              <a:rPr sz="1032">
-                <a:solidFill>
-                  <a:srgbClr val="5C6574"/>
-                </a:solidFill>
-                <a:latin typeface="Consolas"/>
-                <a:ea typeface="Consolas"/>
-                <a:cs typeface="Consolas"/>
-              </a:rPr>
-              <a:t>.</a:t>
-            </a:r>
           </a:p>
           <a:p xmlns:a="http://schemas.openxmlformats.org/drawingml/2006/main">
             <a:pPr>
@@ -21040,6 +21007,28 @@
                 <a:ea typeface="Consolas"/>
                 <a:cs typeface="Consolas"/>
               </a:rPr>
+              <a:t>It</a:t>
+            </a:r>
+            <a:r>
+              <a:rPr sz="1032">
+                <a:solidFill>
+                  <a:srgbClr val="5C6574"/>
+                </a:solidFill>
+                <a:latin typeface="Consolas"/>
+                <a:ea typeface="Consolas"/>
+                <a:cs typeface="Consolas"/>
+              </a:rPr>
+              <a:t>.</a:t>
+            </a:r>
+            <a:r>
+              <a:rPr sz="1032" b="1">
+                <a:solidFill>
+                  <a:srgbClr val="7442C8"/>
+                </a:solidFill>
+                <a:latin typeface="Consolas"/>
+                <a:ea typeface="Consolas"/>
+                <a:cs typeface="Consolas"/>
+              </a:rPr>
               <a:t>IsAny</a:t>
             </a:r>
             <a:r>
@@ -21381,28 +21370,6 @@
               </a:rPr>
               <a:t>(</a:t>
             </a:r>
-            <a:r>
-              <a:rPr sz="1032" b="1">
-                <a:solidFill>
-                  <a:srgbClr val="7442C8"/>
-                </a:solidFill>
-                <a:latin typeface="Consolas"/>
-                <a:ea typeface="Consolas"/>
-                <a:cs typeface="Consolas"/>
-              </a:rPr>
-              <a:t>TestRequests</a:t>
-            </a:r>
-            <a:r>
-              <a:rPr sz="1032">
-                <a:solidFill>
-                  <a:srgbClr val="5C6574"/>
-                </a:solidFill>
-                <a:latin typeface="Consolas"/>
-                <a:ea typeface="Consolas"/>
-                <a:cs typeface="Consolas"/>
-              </a:rPr>
-              <a:t>.</a:t>
-            </a:r>
           </a:p>
           <a:p xmlns:a="http://schemas.openxmlformats.org/drawingml/2006/main">
             <a:pPr>
@@ -21448,6 +21415,28 @@
                 <a:ea typeface="Consolas"/>
                 <a:cs typeface="Consolas"/>
               </a:rPr>
+              <a:t>TestRequests</a:t>
+            </a:r>
+            <a:r>
+              <a:rPr sz="1032">
+                <a:solidFill>
+                  <a:srgbClr val="5C6574"/>
+                </a:solidFill>
+                <a:latin typeface="Consolas"/>
+                <a:ea typeface="Consolas"/>
+                <a:cs typeface="Consolas"/>
+              </a:rPr>
+              <a:t>.</a:t>
+            </a:r>
+            <a:r>
+              <a:rPr sz="1032" b="1">
+                <a:solidFill>
+                  <a:srgbClr val="7442C8"/>
+                </a:solidFill>
+                <a:latin typeface="Consolas"/>
+                <a:ea typeface="Consolas"/>
+                <a:cs typeface="Consolas"/>
+              </a:rPr>
               <a:t>ValidFutureReservation</a:t>
             </a:r>
             <a:r>
@@ -21789,83 +21778,6 @@
               </a:rPr>
               <a:t>,</a:t>
             </a:r>
-            <a:r>
-              <a:rPr sz="1032">
-                <a:solidFill>
-                  <a:srgbClr val="262B36"/>
-                </a:solidFill>
-                <a:latin typeface="Consolas"/>
-                <a:ea typeface="Consolas"/>
-                <a:cs typeface="Consolas"/>
-              </a:rPr>
-              <a:t> </a:t>
-            </a:r>
-            <a:r>
-              <a:rPr sz="1032" b="1">
-                <a:solidFill>
-                  <a:srgbClr val="7442C8"/>
-                </a:solidFill>
-                <a:latin typeface="Consolas"/>
-                <a:ea typeface="Consolas"/>
-                <a:cs typeface="Consolas"/>
-              </a:rPr>
-              <a:t>Is</a:t>
-            </a:r>
-            <a:r>
-              <a:rPr sz="1032">
-                <a:solidFill>
-                  <a:srgbClr val="5C6574"/>
-                </a:solidFill>
-                <a:latin typeface="Consolas"/>
-                <a:ea typeface="Consolas"/>
-                <a:cs typeface="Consolas"/>
-              </a:rPr>
-              <a:t>.</a:t>
-            </a:r>
-            <a:r>
-              <a:rPr sz="1032" b="1">
-                <a:solidFill>
-                  <a:srgbClr val="7442C8"/>
-                </a:solidFill>
-                <a:latin typeface="Consolas"/>
-                <a:ea typeface="Consolas"/>
-                <a:cs typeface="Consolas"/>
-              </a:rPr>
-              <a:t>EqualTo</a:t>
-            </a:r>
-            <a:r>
-              <a:rPr sz="1032">
-                <a:solidFill>
-                  <a:srgbClr val="5C6574"/>
-                </a:solidFill>
-                <a:latin typeface="Consolas"/>
-                <a:ea typeface="Consolas"/>
-                <a:cs typeface="Consolas"/>
-              </a:rPr>
-              <a:t>(</a:t>
-            </a:r>
-            <a:r>
-              <a:rPr sz="1032">
-                <a:solidFill>
-                  <a:srgbClr val="A95921"/>
-                </a:solidFill>
-                <a:latin typeface="Consolas"/>
-                <a:ea typeface="Consolas"/>
-                <a:cs typeface="Consolas"/>
-              </a:rPr>
-              <a:t>"</a:t>
-            </a:r>
-            <a:r>
-              <a:rPr sz="1032" b="1">
-                <a:solidFill>
-                  <a:srgbClr val="7442C8"/>
-                </a:solidFill>
-                <a:latin typeface="Consolas"/>
-                <a:ea typeface="Consolas"/>
-                <a:cs typeface="Consolas"/>
-              </a:rPr>
-              <a:t>OverlappingReservat</a:t>
-            </a:r>
           </a:p>
           <a:p xmlns:a="http://schemas.openxmlformats.org/drawingml/2006/main">
             <a:pPr>
@@ -21900,7 +21812,73 @@
                 <a:ea typeface="Consolas"/>
                 <a:cs typeface="Consolas"/>
               </a:rPr>
-              <a:t>      ion</a:t>
+              <a:t>      </a:t>
+            </a:r>
+            <a:r>
+              <a:rPr sz="1032" b="1">
+                <a:solidFill>
+                  <a:srgbClr val="7442C8"/>
+                </a:solidFill>
+                <a:latin typeface="Consolas"/>
+                <a:ea typeface="Consolas"/>
+                <a:cs typeface="Consolas"/>
+              </a:rPr>
+              <a:t>Is</a:t>
+            </a:r>
+            <a:r>
+              <a:rPr sz="1032">
+                <a:solidFill>
+                  <a:srgbClr val="5C6574"/>
+                </a:solidFill>
+                <a:latin typeface="Consolas"/>
+                <a:ea typeface="Consolas"/>
+                <a:cs typeface="Consolas"/>
+              </a:rPr>
+              <a:t>.</a:t>
+            </a:r>
+            <a:r>
+              <a:rPr sz="1032" b="1">
+                <a:solidFill>
+                  <a:srgbClr val="7442C8"/>
+                </a:solidFill>
+                <a:latin typeface="Consolas"/>
+                <a:ea typeface="Consolas"/>
+                <a:cs typeface="Consolas"/>
+              </a:rPr>
+              <a:t>EqualTo</a:t>
+            </a:r>
+            <a:r>
+              <a:rPr sz="1032">
+                <a:solidFill>
+                  <a:srgbClr val="5C6574"/>
+                </a:solidFill>
+                <a:latin typeface="Consolas"/>
+                <a:ea typeface="Consolas"/>
+                <a:cs typeface="Consolas"/>
+              </a:rPr>
+              <a:t>(</a:t>
+            </a:r>
+            <a:r>
+              <a:rPr sz="1032">
+                <a:solidFill>
+                  <a:srgbClr val="A95921"/>
+                </a:solidFill>
+                <a:latin typeface="Consolas"/>
+                <a:ea typeface="Consolas"/>
+                <a:cs typeface="Consolas"/>
+              </a:rPr>
+              <a:t>"</a:t>
+            </a:r>
+            <a:r>
+              <a:rPr sz="1032" b="1">
+                <a:solidFill>
+                  <a:srgbClr val="7442C8"/>
+                </a:solidFill>
+                <a:latin typeface="Consolas"/>
+                <a:ea typeface="Consolas"/>
+                <a:cs typeface="Consolas"/>
+              </a:rPr>
+              <a:t>OverlappingReservation</a:t>
             </a:r>
             <a:r>
               <a:rPr sz="1032">
@@ -25474,39 +25452,6 @@
               </a:rPr>
               <a:t>),</a:t>
             </a:r>
-            <a:r>
-              <a:rPr sz="1049">
-                <a:solidFill>
-                  <a:srgbClr val="262B36"/>
-                </a:solidFill>
-                <a:latin typeface="Consolas"/>
-                <a:ea typeface="Consolas"/>
-                <a:cs typeface="Consolas"/>
-              </a:rPr>
-              <a:t> </a:t>
-            </a:r>
-            <a:r>
-              <a:rPr sz="1049" b="1">
-                <a:solidFill>
-                  <a:srgbClr val="7442C8"/>
-                </a:solidFill>
-                <a:latin typeface="Consolas"/>
-                <a:ea typeface="Consolas"/>
-                <a:cs typeface="Consolas"/>
-              </a:rPr>
-              <a:t>Times</a:t>
-            </a:r>
-            <a:r>
-              <a:rPr sz="1049">
-                <a:solidFill>
-                  <a:srgbClr val="5C6574"/>
-                </a:solidFill>
-                <a:latin typeface="Consolas"/>
-                <a:ea typeface="Consolas"/>
-                <a:cs typeface="Consolas"/>
-              </a:rPr>
-              <a:t>.</a:t>
-            </a:r>
           </a:p>
           <a:p xmlns:a="http://schemas.openxmlformats.org/drawingml/2006/main">
             <a:pPr>
@@ -25542,6 +25487,28 @@
                 <a:cs typeface="Consolas"/>
               </a:rPr>
               <a:t>    </a:t>
+            </a:r>
+            <a:r>
+              <a:rPr sz="1049" b="1">
+                <a:solidFill>
+                  <a:srgbClr val="7442C8"/>
+                </a:solidFill>
+                <a:latin typeface="Consolas"/>
+                <a:ea typeface="Consolas"/>
+                <a:cs typeface="Consolas"/>
+              </a:rPr>
+              <a:t>Times</a:t>
+            </a:r>
+            <a:r>
+              <a:rPr sz="1049">
+                <a:solidFill>
+                  <a:srgbClr val="5C6574"/>
+                </a:solidFill>
+                <a:latin typeface="Consolas"/>
+                <a:ea typeface="Consolas"/>
+                <a:cs typeface="Consolas"/>
+              </a:rPr>
+              <a:t>.</a:t>
             </a:r>
             <a:r>
               <a:rPr sz="1049" b="1">
